--- a/make_presentation/templates/templates/premium/no_logo_6.pptx
+++ b/make_presentation/templates/templates/premium/no_logo_6.pptx
@@ -115,7 +115,13 @@
               <a:rPr b="0" lang="en-US" sz="2000" spc="-1" strike="noStrike">
                 <a:latin typeface="Arial"/>
               </a:rPr>
-              <a:t>Click to edit the notes format</a:t>
+              <a:t>Click to edit the notes </a:t>
+            </a:r>
+            <a:r>
+              <a:rPr b="0" lang="en-US" sz="2000" spc="-1" strike="noStrike">
+                <a:latin typeface="Arial"/>
+              </a:rPr>
+              <a:t>format</a:t>
             </a:r>
             <a:endParaRPr b="0" lang="en-US" sz="2000" spc="-1" strike="noStrike">
               <a:latin typeface="Arial"/>
@@ -300,7 +306,7 @@
             <a:pPr algn="r">
               <a:buNone/>
             </a:pPr>
-            <a:fld id="{D7AA464A-E480-4918-9020-A6D1A8475F73}" type="slidenum">
+            <a:fld id="{A6990B58-DB97-416B-8770-014FE8212CEE}" type="slidenum">
               <a:rPr b="0" lang="en-US" sz="1400" spc="-1" strike="noStrike">
                 <a:latin typeface="Times New Roman"/>
               </a:rPr>
@@ -441,7 +447,7 @@
               </a:lnSpc>
               <a:buNone/>
             </a:pPr>
-            <a:fld id="{A08F4D0F-553C-490A-8759-2001ECE0970F}" type="slidenum">
+            <a:fld id="{9DC4658D-1A99-47AC-ABE9-D0194D5F63BC}" type="slidenum">
               <a:rPr b="0" lang="en-US" sz="1800" spc="-1" strike="noStrike">
                 <a:solidFill>
                   <a:srgbClr val="000000"/>
@@ -585,7 +591,7 @@
               </a:lnSpc>
               <a:buNone/>
             </a:pPr>
-            <a:fld id="{28C5532C-BB88-4E70-B407-619142859351}" type="slidenum">
+            <a:fld id="{3EB2F133-BCD1-45A9-B489-3C3910FFF6C4}" type="slidenum">
               <a:rPr b="0" lang="en-US" sz="1800" spc="-1" strike="noStrike">
                 <a:solidFill>
                   <a:srgbClr val="000000"/>
@@ -729,7 +735,7 @@
               </a:lnSpc>
               <a:buNone/>
             </a:pPr>
-            <a:fld id="{53106528-B1C9-4EAB-B00C-7921FAEB699B}" type="slidenum">
+            <a:fld id="{0755732B-3572-43A9-B89D-746EE18C3A08}" type="slidenum">
               <a:rPr b="0" lang="en-US" sz="1800" spc="-1" strike="noStrike">
                 <a:solidFill>
                   <a:srgbClr val="000000"/>
@@ -873,7 +879,7 @@
               </a:lnSpc>
               <a:buNone/>
             </a:pPr>
-            <a:fld id="{FB4FC705-57DC-4543-992D-D4DAD2086D6C}" type="slidenum">
+            <a:fld id="{7E4D61C9-EF50-4DE1-A893-8F9EDF41D1CA}" type="slidenum">
               <a:rPr b="0" lang="en-US" sz="1800" spc="-1" strike="noStrike">
                 <a:solidFill>
                   <a:srgbClr val="000000"/>
@@ -1017,7 +1023,7 @@
               </a:lnSpc>
               <a:buNone/>
             </a:pPr>
-            <a:fld id="{CAC4A247-F69B-4DD2-A184-FF187E930A2F}" type="slidenum">
+            <a:fld id="{9D5F0C71-DE4C-42A2-9300-8F4034CED394}" type="slidenum">
               <a:rPr b="0" lang="en-US" sz="1800" spc="-1" strike="noStrike">
                 <a:solidFill>
                   <a:srgbClr val="000000"/>
@@ -1161,7 +1167,7 @@
               </a:lnSpc>
               <a:buNone/>
             </a:pPr>
-            <a:fld id="{E358282C-A0CC-4B89-AD0B-9147ACD37585}" type="slidenum">
+            <a:fld id="{4D9FB402-12CA-4F43-AE41-41A0749FEF18}" type="slidenum">
               <a:rPr b="0" lang="en-US" sz="1800" spc="-1" strike="noStrike">
                 <a:solidFill>
                   <a:srgbClr val="000000"/>
@@ -3204,7 +3210,7 @@
         <p:spPr>
           <a:xfrm>
             <a:off x="457200" y="4027680"/>
-            <a:ext cx="10287000" cy="2030760"/>
+            <a:ext cx="10928880" cy="2030760"/>
           </a:xfrm>
           <a:prstGeom prst="rect">
             <a:avLst/>
@@ -3235,7 +3241,7 @@
               </a:tabLst>
             </a:pPr>
             <a:r>
-              <a:rPr b="1" lang="en-US" sz="4000" spc="-1" strike="noStrike">
+              <a:rPr b="1" lang="en-US" sz="4800" spc="-1" strike="noStrike">
                 <a:solidFill>
                   <a:srgbClr val="ffffff"/>
                 </a:solidFill>
@@ -3244,7 +3250,7 @@
               </a:rPr>
               <a:t>TITLE</a:t>
             </a:r>
-            <a:endParaRPr b="0" lang="en-US" sz="4000" spc="-1" strike="noStrike">
+            <a:endParaRPr b="0" lang="en-US" sz="4800" spc="-1" strike="noStrike">
               <a:latin typeface="Arial"/>
             </a:endParaRPr>
           </a:p>
